--- a/media/resources/files/Onduktar_Akcha_KondumB_glUt04c_GvJRMos_6WfWEFB.pptx
+++ b/media/resources/files/Onduktar_Akcha_KondumB_glUt04c_GvJRMos_6WfWEFB.pptx
@@ -17291,7 +17291,7 @@
                 <a:ea typeface="+mn-ea"/>
                 <a:cs typeface="+mn-cs"/>
               </a:rPr>
-              <a:t>Турдуу пикирлер учун ыраазычылык билдиребиз.</a:t>
+              <a:t>Түрдүү пикирлер үчүн ыраазычылык билдиребиз.</a:t>
             </a:r>
           </a:p>
           <a:p>

--- a/media/resources/files/Onduktar_Akcha_KondumB_glUt04c_GvJRMos_6WfWEFB.pptx
+++ b/media/resources/files/Onduktar_Akcha_KondumB_glUt04c_GvJRMos_6WfWEFB.pptx
@@ -1944,7 +1944,7 @@
                     <a:schemeClr val="tx1"/>
                   </a:solidFill>
                 </a:rPr>
-                <a:t>1.07</a:t>
+                <a:t>1,07</a:t>
               </a:r>
               <a:r>
                 <a:rPr lang="ky-KG" sz="1300" dirty="0">
@@ -4980,7 +4980,7 @@
             <a:pPr algn="l"/>
             <a:r>
               <a:rPr lang="en-GB" sz="2000" dirty="0"/>
-              <a:t>4.48</a:t>
+              <a:t>4,48</a:t>
             </a:r>
             <a:r>
               <a:rPr lang="ky-KG" sz="2000" dirty="0"/>
@@ -4988,7 +4988,7 @@
             </a:r>
             <a:r>
               <a:rPr lang="en-GB" sz="2000" dirty="0"/>
-              <a:t>, 5.52</a:t>
+              <a:t>, 5,52</a:t>
             </a:r>
             <a:r>
               <a:rPr lang="ky-KG" sz="2000" dirty="0"/>
@@ -5036,7 +5036,7 @@
             <a:pPr algn="l"/>
             <a:r>
               <a:rPr lang="en-GB" sz="2000" dirty="0"/>
-              <a:t>2.10</a:t>
+              <a:t>2,10</a:t>
             </a:r>
             <a:r>
               <a:rPr lang="ky-KG" sz="2000" dirty="0"/>
@@ -5044,7 +5044,7 @@
             </a:r>
             <a:r>
               <a:rPr lang="en-GB" sz="2000" dirty="0"/>
-              <a:t>, 7.90</a:t>
+              <a:t>, 7,90</a:t>
             </a:r>
             <a:r>
               <a:rPr lang="ky-KG" sz="2000" dirty="0"/>
@@ -5100,7 +5100,7 @@
             </a:r>
             <a:r>
               <a:rPr lang="en-GB" sz="2000" dirty="0"/>
-              <a:t>, 9.22</a:t>
+              <a:t>, 9,22</a:t>
             </a:r>
             <a:r>
               <a:rPr lang="ky-KG" sz="2000" dirty="0"/>
@@ -5148,7 +5148,7 @@
             <a:pPr algn="l"/>
             <a:r>
               <a:rPr lang="en-GB" sz="2000" dirty="0"/>
-              <a:t>4.80</a:t>
+              <a:t>4,80</a:t>
             </a:r>
             <a:r>
               <a:rPr lang="ky-KG" sz="2000" dirty="0"/>
@@ -5156,7 +5156,7 @@
             </a:r>
             <a:r>
               <a:rPr lang="en-GB" sz="2000" dirty="0"/>
-              <a:t>, 5.20</a:t>
+              <a:t>, 5,20</a:t>
             </a:r>
             <a:r>
               <a:rPr lang="ky-KG" sz="2000" dirty="0"/>
@@ -5204,7 +5204,7 @@
             <a:pPr algn="l"/>
             <a:r>
               <a:rPr lang="en-GB" sz="2000" dirty="0"/>
-              <a:t>1.82</a:t>
+              <a:t>1,82</a:t>
             </a:r>
             <a:r>
               <a:rPr lang="ky-KG" sz="2000" dirty="0"/>
@@ -5212,7 +5212,7 @@
             </a:r>
             <a:r>
               <a:rPr lang="en-GB" sz="2000" dirty="0"/>
-              <a:t>, 8.18</a:t>
+              <a:t>, 8,18</a:t>
             </a:r>
             <a:r>
               <a:rPr lang="ky-KG" sz="2000" dirty="0"/>
@@ -5260,7 +5260,7 @@
             <a:pPr algn="l"/>
             <a:r>
               <a:rPr lang="en-GB" sz="2000" dirty="0"/>
-              <a:t>3.49</a:t>
+              <a:t>3,49</a:t>
             </a:r>
             <a:r>
               <a:rPr lang="ky-KG" sz="2000" dirty="0"/>
@@ -5268,7 +5268,7 @@
             </a:r>
             <a:r>
               <a:rPr lang="en-GB" sz="2000" dirty="0"/>
-              <a:t>, 6.51</a:t>
+              <a:t>, 6,51</a:t>
             </a:r>
             <a:r>
               <a:rPr lang="ky-KG" sz="2000" dirty="0"/>
@@ -5316,7 +5316,7 @@
             <a:pPr algn="l"/>
             <a:r>
               <a:rPr lang="en-GB" sz="2000" dirty="0"/>
-              <a:t>3.26</a:t>
+              <a:t>3,26</a:t>
             </a:r>
             <a:r>
               <a:rPr lang="ky-KG" sz="2000" dirty="0"/>
@@ -5324,7 +5324,7 @@
             </a:r>
             <a:r>
               <a:rPr lang="en-GB" sz="2000" dirty="0"/>
-              <a:t>, 6.74</a:t>
+              <a:t>, 6,74</a:t>
             </a:r>
             <a:r>
               <a:rPr lang="ky-KG" sz="2000" dirty="0"/>
@@ -5376,7 +5376,7 @@
             </a:r>
             <a:r>
               <a:rPr lang="ky-KG" sz="2000" dirty="0"/>
-              <a:t>.</a:t>
+              <a:t>,</a:t>
             </a:r>
             <a:r>
               <a:rPr lang="en-GB" sz="2000" dirty="0"/>
@@ -5388,7 +5388,7 @@
             </a:r>
             <a:r>
               <a:rPr lang="en-GB" sz="2000" dirty="0"/>
-              <a:t>, 1.44</a:t>
+              <a:t>, 1,44</a:t>
             </a:r>
             <a:r>
               <a:rPr lang="ky-KG" sz="2000" dirty="0"/>
@@ -6010,7 +6010,7 @@
                     <a:schemeClr val="tx1"/>
                   </a:solidFill>
                 </a:rPr>
-                <a:t>1.07</a:t>
+                <a:t>1,07</a:t>
               </a:r>
               <a:r>
                 <a:rPr lang="ky-KG" sz="1300" dirty="0">
@@ -9037,7 +9037,7 @@
             <a:pPr algn="l"/>
             <a:r>
               <a:rPr lang="en-GB" sz="2000" dirty="0"/>
-              <a:t>4.48</a:t>
+              <a:t>4,48</a:t>
             </a:r>
             <a:r>
               <a:rPr lang="ky-KG" sz="2000" dirty="0"/>
@@ -9045,7 +9045,7 @@
             </a:r>
             <a:r>
               <a:rPr lang="en-GB" sz="2000" dirty="0"/>
-              <a:t>, 5.52</a:t>
+              <a:t>, 5,52</a:t>
             </a:r>
             <a:r>
               <a:rPr lang="ky-KG" sz="2000" dirty="0"/>
@@ -9093,7 +9093,7 @@
             <a:pPr algn="l"/>
             <a:r>
               <a:rPr lang="en-GB" sz="2000" dirty="0"/>
-              <a:t>2.10</a:t>
+              <a:t>2,10</a:t>
             </a:r>
             <a:r>
               <a:rPr lang="ky-KG" sz="2000" dirty="0"/>
@@ -9101,7 +9101,7 @@
             </a:r>
             <a:r>
               <a:rPr lang="en-GB" sz="2000" dirty="0"/>
-              <a:t>, 7.90</a:t>
+              <a:t>, 7,90</a:t>
             </a:r>
             <a:r>
               <a:rPr lang="ky-KG" sz="2000" dirty="0"/>
@@ -9157,7 +9157,7 @@
             </a:r>
             <a:r>
               <a:rPr lang="en-GB" sz="2000" dirty="0"/>
-              <a:t>, 9.22</a:t>
+              <a:t>, 9,22</a:t>
             </a:r>
             <a:r>
               <a:rPr lang="ky-KG" sz="2000" dirty="0"/>
@@ -9205,7 +9205,7 @@
             <a:pPr algn="l"/>
             <a:r>
               <a:rPr lang="en-GB" sz="2000" dirty="0"/>
-              <a:t>4.80</a:t>
+              <a:t>4,80</a:t>
             </a:r>
             <a:r>
               <a:rPr lang="ky-KG" sz="2000" dirty="0"/>
@@ -9213,7 +9213,7 @@
             </a:r>
             <a:r>
               <a:rPr lang="en-GB" sz="2000" dirty="0"/>
-              <a:t>, 5.20</a:t>
+              <a:t>, 5,20</a:t>
             </a:r>
             <a:r>
               <a:rPr lang="ky-KG" sz="2000" dirty="0"/>
@@ -9261,7 +9261,7 @@
             <a:pPr algn="l"/>
             <a:r>
               <a:rPr lang="en-GB" sz="2000" dirty="0"/>
-              <a:t>1.82</a:t>
+              <a:t>1,82</a:t>
             </a:r>
             <a:r>
               <a:rPr lang="ky-KG" sz="2000" dirty="0"/>
@@ -9269,7 +9269,7 @@
             </a:r>
             <a:r>
               <a:rPr lang="en-GB" sz="2000" dirty="0"/>
-              <a:t>, 8.18</a:t>
+              <a:t>, 8,18</a:t>
             </a:r>
             <a:r>
               <a:rPr lang="ky-KG" sz="2000" dirty="0"/>
@@ -9317,7 +9317,7 @@
             <a:pPr algn="l"/>
             <a:r>
               <a:rPr lang="en-GB" sz="2000" dirty="0"/>
-              <a:t>3.49</a:t>
+              <a:t>3,49</a:t>
             </a:r>
             <a:r>
               <a:rPr lang="ky-KG" sz="2000" dirty="0"/>
@@ -9325,7 +9325,7 @@
             </a:r>
             <a:r>
               <a:rPr lang="en-GB" sz="2000" dirty="0"/>
-              <a:t>, 6.51</a:t>
+              <a:t>, 6,51</a:t>
             </a:r>
             <a:r>
               <a:rPr lang="ky-KG" sz="2000" dirty="0"/>
@@ -9373,7 +9373,7 @@
             <a:pPr algn="l"/>
             <a:r>
               <a:rPr lang="en-GB" sz="2000" dirty="0"/>
-              <a:t>3.26</a:t>
+              <a:t>3,26</a:t>
             </a:r>
             <a:r>
               <a:rPr lang="ky-KG" sz="2000" dirty="0"/>
@@ -9381,7 +9381,7 @@
             </a:r>
             <a:r>
               <a:rPr lang="en-GB" sz="2000" dirty="0"/>
-              <a:t>, 6.74</a:t>
+              <a:t>, 6,74</a:t>
             </a:r>
             <a:r>
               <a:rPr lang="ky-KG" sz="2000" dirty="0"/>
@@ -9429,7 +9429,7 @@
             <a:pPr algn="l"/>
             <a:r>
               <a:rPr lang="en-GB" sz="2000" dirty="0"/>
-              <a:t>£856, £1.44</a:t>
+              <a:t>£856, £1,44</a:t>
             </a:r>
           </a:p>
         </p:txBody>
@@ -9472,7 +9472,7 @@
             <a:pPr algn="l"/>
             <a:r>
               <a:rPr lang="en-GB" sz="2000" dirty="0"/>
-              <a:t>8.83</a:t>
+              <a:t>8,83</a:t>
             </a:r>
             <a:r>
               <a:rPr lang="ky-KG" sz="2000" dirty="0"/>
@@ -9480,7 +9480,7 @@
             </a:r>
             <a:r>
               <a:rPr lang="en-GB" sz="2000" dirty="0"/>
-              <a:t>, 1.17</a:t>
+              <a:t>, 1,17</a:t>
             </a:r>
             <a:r>
               <a:rPr lang="ky-KG" sz="2000" dirty="0"/>
@@ -9528,7 +9528,7 @@
             <a:pPr algn="l"/>
             <a:r>
               <a:rPr lang="en-GB" sz="2000" dirty="0"/>
-              <a:t>6.24</a:t>
+              <a:t>6,24</a:t>
             </a:r>
             <a:r>
               <a:rPr lang="ky-KG" sz="2000" dirty="0"/>
@@ -9536,7 +9536,7 @@
             </a:r>
             <a:r>
               <a:rPr lang="en-GB" sz="2000" dirty="0"/>
-              <a:t>, 3.76</a:t>
+              <a:t>, 3,76</a:t>
             </a:r>
             <a:r>
               <a:rPr lang="ky-KG" sz="2000" dirty="0"/>
@@ -9584,7 +9584,7 @@
             <a:pPr algn="l"/>
             <a:r>
               <a:rPr lang="en-GB" sz="2000" dirty="0"/>
-              <a:t>6.07</a:t>
+              <a:t>6,07</a:t>
             </a:r>
             <a:r>
               <a:rPr lang="ky-KG" sz="2000" dirty="0"/>
@@ -9592,7 +9592,7 @@
             </a:r>
             <a:r>
               <a:rPr lang="en-GB" sz="2000" dirty="0"/>
-              <a:t>, 3.93</a:t>
+              <a:t>, 3,93</a:t>
             </a:r>
             <a:r>
               <a:rPr lang="ky-KG" sz="2000" dirty="0"/>
@@ -9640,7 +9640,7 @@
             <a:pPr algn="l"/>
             <a:r>
               <a:rPr lang="en-GB" sz="2000" dirty="0"/>
-              <a:t>5.84</a:t>
+              <a:t>5,84</a:t>
             </a:r>
             <a:r>
               <a:rPr lang="ky-KG" sz="2000" dirty="0"/>
@@ -9648,7 +9648,7 @@
             </a:r>
             <a:r>
               <a:rPr lang="en-GB" sz="2000" dirty="0"/>
-              <a:t>, 4.16</a:t>
+              <a:t>, 4,16</a:t>
             </a:r>
             <a:r>
               <a:rPr lang="ky-KG" sz="2000" dirty="0"/>
@@ -9696,7 +9696,7 @@
             <a:pPr algn="l"/>
             <a:r>
               <a:rPr lang="en-GB" sz="2000" dirty="0"/>
-              <a:t>6.87</a:t>
+              <a:t>6,87</a:t>
             </a:r>
             <a:r>
               <a:rPr lang="ky-KG" sz="2000" dirty="0"/>
@@ -9704,7 +9704,7 @@
             </a:r>
             <a:r>
               <a:rPr lang="en-GB" sz="2000" dirty="0"/>
-              <a:t>, 3.13</a:t>
+              <a:t>, 3,13</a:t>
             </a:r>
             <a:r>
               <a:rPr lang="ky-KG" sz="2000" dirty="0"/>
@@ -9752,7 +9752,7 @@
             <a:pPr algn="l"/>
             <a:r>
               <a:rPr lang="en-GB" sz="2000" dirty="0"/>
-              <a:t>8.08</a:t>
+              <a:t>8,08</a:t>
             </a:r>
             <a:r>
               <a:rPr lang="ky-KG" sz="2000" dirty="0"/>
@@ -9760,7 +9760,7 @@
             </a:r>
             <a:r>
               <a:rPr lang="en-GB" sz="2000" dirty="0"/>
-              <a:t>, 1.92</a:t>
+              <a:t>, 1,92</a:t>
             </a:r>
             <a:r>
               <a:rPr lang="ky-KG" sz="2000" dirty="0"/>
@@ -9808,7 +9808,7 @@
             <a:pPr algn="l"/>
             <a:r>
               <a:rPr lang="en-GB" sz="2000" dirty="0"/>
-              <a:t>7.20</a:t>
+              <a:t>7,20</a:t>
             </a:r>
             <a:r>
               <a:rPr lang="ky-KG" sz="2000" dirty="0"/>
@@ -9816,7 +9816,7 @@
             </a:r>
             <a:r>
               <a:rPr lang="en-GB" sz="2000" dirty="0"/>
-              <a:t>, 2.80</a:t>
+              <a:t>, 2,80</a:t>
             </a:r>
             <a:r>
               <a:rPr lang="ky-KG" sz="2000" dirty="0"/>
@@ -9864,7 +9864,7 @@
             <a:pPr algn="l"/>
             <a:r>
               <a:rPr lang="en-GB" sz="2000" dirty="0"/>
-              <a:t>3.45</a:t>
+              <a:t>3,45</a:t>
             </a:r>
             <a:r>
               <a:rPr lang="ky-KG" sz="2000" dirty="0"/>
@@ -9872,7 +9872,7 @@
             </a:r>
             <a:r>
               <a:rPr lang="en-GB" sz="2000" dirty="0"/>
-              <a:t>, 6.55</a:t>
+              <a:t>, 6,55</a:t>
             </a:r>
             <a:r>
               <a:rPr lang="ky-KG" sz="2000" dirty="0"/>
@@ -10494,7 +10494,7 @@
                     <a:schemeClr val="tx1"/>
                   </a:solidFill>
                 </a:rPr>
-                <a:t>1.07</a:t>
+                <a:t>1,07</a:t>
               </a:r>
               <a:r>
                 <a:rPr lang="ky-KG" sz="1300" dirty="0">
@@ -13928,7 +13928,7 @@
                     <a:schemeClr val="tx1"/>
                   </a:solidFill>
                 </a:rPr>
-                <a:t>1.07</a:t>
+                <a:t>1,07</a:t>
               </a:r>
               <a:r>
                 <a:rPr lang="ky-KG" sz="1300" dirty="0">
